--- a/app_docs/Affichage_Zygo.pptx
+++ b/app_docs/Affichage_Zygo.pptx
@@ -208,7 +208,7 @@
           <a:p>
             <a:fld id="{2CD302EA-995F-4616-9BA1-28C1D6F16BD4}" type="datetimeFigureOut">
               <a:rPr lang="fr-FR" smtClean="0"/>
-              <a:t>03/07/2025</a:t>
+              <a:t>16/07/2025</a:t>
             </a:fld>
             <a:endParaRPr lang="fr-FR"/>
           </a:p>
@@ -691,7 +691,7 @@
             <a:fld id="{307A8ED8-E0E9-434D-B8C4-B4E7862635BC}" type="datetimeFigureOut">
               <a:rPr lang="fr-FR" smtClean="0"/>
               <a:pPr/>
-              <a:t>03/07/2025</a:t>
+              <a:t>16/07/2025</a:t>
             </a:fld>
             <a:endParaRPr lang="fr-FR"/>
           </a:p>
@@ -858,7 +858,7 @@
             <a:fld id="{307A8ED8-E0E9-434D-B8C4-B4E7862635BC}" type="datetimeFigureOut">
               <a:rPr lang="fr-FR" smtClean="0"/>
               <a:pPr/>
-              <a:t>03/07/2025</a:t>
+              <a:t>16/07/2025</a:t>
             </a:fld>
             <a:endParaRPr lang="fr-FR"/>
           </a:p>
@@ -1035,7 +1035,7 @@
             <a:fld id="{307A8ED8-E0E9-434D-B8C4-B4E7862635BC}" type="datetimeFigureOut">
               <a:rPr lang="fr-FR" smtClean="0"/>
               <a:pPr/>
-              <a:t>03/07/2025</a:t>
+              <a:t>16/07/2025</a:t>
             </a:fld>
             <a:endParaRPr lang="fr-FR"/>
           </a:p>
@@ -1202,7 +1202,7 @@
             <a:fld id="{307A8ED8-E0E9-434D-B8C4-B4E7862635BC}" type="datetimeFigureOut">
               <a:rPr lang="fr-FR" smtClean="0"/>
               <a:pPr/>
-              <a:t>03/07/2025</a:t>
+              <a:t>16/07/2025</a:t>
             </a:fld>
             <a:endParaRPr lang="fr-FR"/>
           </a:p>
@@ -1443,7 +1443,7 @@
             <a:fld id="{307A8ED8-E0E9-434D-B8C4-B4E7862635BC}" type="datetimeFigureOut">
               <a:rPr lang="fr-FR" smtClean="0"/>
               <a:pPr/>
-              <a:t>03/07/2025</a:t>
+              <a:t>16/07/2025</a:t>
             </a:fld>
             <a:endParaRPr lang="fr-FR"/>
           </a:p>
@@ -1672,7 +1672,7 @@
             <a:fld id="{307A8ED8-E0E9-434D-B8C4-B4E7862635BC}" type="datetimeFigureOut">
               <a:rPr lang="fr-FR" smtClean="0"/>
               <a:pPr/>
-              <a:t>03/07/2025</a:t>
+              <a:t>16/07/2025</a:t>
             </a:fld>
             <a:endParaRPr lang="fr-FR"/>
           </a:p>
@@ -2036,7 +2036,7 @@
             <a:fld id="{307A8ED8-E0E9-434D-B8C4-B4E7862635BC}" type="datetimeFigureOut">
               <a:rPr lang="fr-FR" smtClean="0"/>
               <a:pPr/>
-              <a:t>03/07/2025</a:t>
+              <a:t>16/07/2025</a:t>
             </a:fld>
             <a:endParaRPr lang="fr-FR"/>
           </a:p>
@@ -2151,7 +2151,7 @@
             <a:fld id="{307A8ED8-E0E9-434D-B8C4-B4E7862635BC}" type="datetimeFigureOut">
               <a:rPr lang="fr-FR" smtClean="0"/>
               <a:pPr/>
-              <a:t>03/07/2025</a:t>
+              <a:t>16/07/2025</a:t>
             </a:fld>
             <a:endParaRPr lang="fr-FR"/>
           </a:p>
@@ -2243,7 +2243,7 @@
             <a:fld id="{307A8ED8-E0E9-434D-B8C4-B4E7862635BC}" type="datetimeFigureOut">
               <a:rPr lang="fr-FR" smtClean="0"/>
               <a:pPr/>
-              <a:t>03/07/2025</a:t>
+              <a:t>16/07/2025</a:t>
             </a:fld>
             <a:endParaRPr lang="fr-FR"/>
           </a:p>
@@ -2517,7 +2517,7 @@
             <a:fld id="{307A8ED8-E0E9-434D-B8C4-B4E7862635BC}" type="datetimeFigureOut">
               <a:rPr lang="fr-FR" smtClean="0"/>
               <a:pPr/>
-              <a:t>03/07/2025</a:t>
+              <a:t>16/07/2025</a:t>
             </a:fld>
             <a:endParaRPr lang="fr-FR"/>
           </a:p>
@@ -2771,7 +2771,7 @@
             <a:fld id="{307A8ED8-E0E9-434D-B8C4-B4E7862635BC}" type="datetimeFigureOut">
               <a:rPr lang="fr-FR" smtClean="0"/>
               <a:pPr/>
-              <a:t>03/07/2025</a:t>
+              <a:t>16/07/2025</a:t>
             </a:fld>
             <a:endParaRPr lang="fr-FR"/>
           </a:p>
@@ -2981,7 +2981,7 @@
             <a:fld id="{307A8ED8-E0E9-434D-B8C4-B4E7862635BC}" type="datetimeFigureOut">
               <a:rPr lang="fr-FR" smtClean="0"/>
               <a:pPr/>
-              <a:t>03/07/2025</a:t>
+              <a:t>16/07/2025</a:t>
             </a:fld>
             <a:endParaRPr lang="fr-FR"/>
           </a:p>
@@ -3557,7 +3557,7 @@
         </p:nvSpPr>
         <p:spPr>
           <a:xfrm>
-            <a:off x="11340463" y="2763486"/>
+            <a:off x="11340463" y="2977519"/>
             <a:ext cx="13568893" cy="394403"/>
           </a:xfrm>
           <a:prstGeom prst="rect">
@@ -3578,18 +3578,6 @@
                 <a:spcPct val="0"/>
               </a:spcBef>
             </a:pPr>
-            <a:r>
-              <a:rPr lang="en-US" sz="5400" b="1" dirty="0" err="1">
-                <a:solidFill>
-                  <a:srgbClr val="FF914D"/>
-                </a:solidFill>
-                <a:latin typeface="Canva Sans Bold"/>
-                <a:ea typeface="Canva Sans Bold"/>
-                <a:cs typeface="Canva Sans Bold"/>
-                <a:sym typeface="Canva Sans Bold"/>
-              </a:rPr>
-              <a:t>Contrôles</a:t>
-            </a:r>
             <a:r>
               <a:rPr lang="en-US" sz="5400" b="1" dirty="0">
                 <a:solidFill>
@@ -3600,7 +3588,7 @@
                 <a:cs typeface="Canva Sans Bold"/>
                 <a:sym typeface="Canva Sans Bold"/>
               </a:rPr>
-              <a:t> interférométriques / Aberrations</a:t>
+              <a:t>Contrôles interférométriques / Aberrations</a:t>
             </a:r>
           </a:p>
         </p:txBody>
